--- a/08-tooling/ch02-deck/sen0414_ch02_deck_v3_0_0.pptx
+++ b/08-tooling/ch02-deck/sen0414_ch02_deck_v3_0_0.pptx
@@ -4488,8 +4488,8 @@
         </p:nvSpPr>
         <p:spPr>
           <a:xfrm>
-            <a:off x="640080" y="4297680"/>
-            <a:ext cx="7863840" cy="201168"/>
+            <a:off x="640080" y="4261104"/>
+            <a:ext cx="7863840" cy="237744"/>
           </a:xfrm>
           <a:prstGeom prst="rect">
             <a:avLst/>
@@ -4505,7 +4505,7 @@
               <a:buNone/>
             </a:pPr>
             <a:r>
-              <a:rPr lang="en-US" sz="800" i="1" dirty="0">
+              <a:rPr lang="en-US" sz="750" i="1" dirty="0">
                 <a:solidFill>
                   <a:srgbClr val="8B949E"/>
                 </a:solidFill>
@@ -4515,7 +4515,7 @@
               </a:rPr>
               <a:t>program shortcircuit_v1_0_0.py, lines 1 to 4 of 4, run under Python 3.13.16</a:t>
             </a:r>
-            <a:endParaRPr lang="en-US" sz="800" dirty="0"/>
+            <a:endParaRPr lang="en-US" sz="750" dirty="0"/>
           </a:p>
         </p:txBody>
       </p:sp>
@@ -5753,8 +5753,8 @@
         </p:nvSpPr>
         <p:spPr>
           <a:xfrm>
-            <a:off x="640080" y="3739896"/>
-            <a:ext cx="3566160" cy="201168"/>
+            <a:off x="640080" y="3703320"/>
+            <a:ext cx="3566160" cy="237744"/>
           </a:xfrm>
           <a:prstGeom prst="rect">
             <a:avLst/>
@@ -5770,7 +5770,7 @@
               <a:buNone/>
             </a:pPr>
             <a:r>
-              <a:rPr lang="en-US" sz="800" i="1" dirty="0">
+              <a:rPr lang="en-US" sz="750" i="1" dirty="0">
                 <a:solidFill>
                   <a:srgbClr val="8B949E"/>
                 </a:solidFill>
@@ -5780,7 +5780,7 @@
               </a:rPr>
               <a:t>program indent_in_v1_0_0.py, lines 1 to 5 of 5, run under Python 3.13.16</a:t>
             </a:r>
-            <a:endParaRPr lang="en-US" sz="800" dirty="0"/>
+            <a:endParaRPr lang="en-US" sz="750" dirty="0"/>
           </a:p>
         </p:txBody>
       </p:sp>
@@ -6153,8 +6153,8 @@
         </p:nvSpPr>
         <p:spPr>
           <a:xfrm>
-            <a:off x="4846320" y="3739896"/>
-            <a:ext cx="3657600" cy="201168"/>
+            <a:off x="4846320" y="3703320"/>
+            <a:ext cx="3657600" cy="237744"/>
           </a:xfrm>
           <a:prstGeom prst="rect">
             <a:avLst/>
@@ -6170,7 +6170,7 @@
               <a:buNone/>
             </a:pPr>
             <a:r>
-              <a:rPr lang="en-US" sz="800" i="1" dirty="0">
+              <a:rPr lang="en-US" sz="750" i="1" dirty="0">
                 <a:solidFill>
                   <a:srgbClr val="8B949E"/>
                 </a:solidFill>
@@ -6180,7 +6180,7 @@
               </a:rPr>
               <a:t>program indent_out_v1_0_0.py, lines 1 to 5 of 5, run under Python 3.13.16</a:t>
             </a:r>
-            <a:endParaRPr lang="en-US" sz="800" dirty="0"/>
+            <a:endParaRPr lang="en-US" sz="750" dirty="0"/>
           </a:p>
         </p:txBody>
       </p:sp>
@@ -7617,8 +7617,8 @@
         </p:nvSpPr>
         <p:spPr>
           <a:xfrm>
-            <a:off x="4114800" y="3557016"/>
-            <a:ext cx="4389120" cy="201168"/>
+            <a:off x="4114800" y="3520440"/>
+            <a:ext cx="4389120" cy="237744"/>
           </a:xfrm>
           <a:prstGeom prst="rect">
             <a:avLst/>
@@ -7634,7 +7634,7 @@
               <a:buNone/>
             </a:pPr>
             <a:r>
-              <a:rPr lang="en-US" sz="800" i="1" dirty="0">
+              <a:rPr lang="en-US" sz="750" i="1" dirty="0">
                 <a:solidFill>
                   <a:srgbClr val="8B949E"/>
                 </a:solidFill>
@@ -7644,7 +7644,7 @@
               </a:rPr>
               <a:t>program password_v1_0_0.py, lines 1 to 8 of 8, run under Python 3.13.16</a:t>
             </a:r>
-            <a:endParaRPr lang="en-US" sz="800" dirty="0"/>
+            <a:endParaRPr lang="en-US" sz="750" dirty="0"/>
           </a:p>
         </p:txBody>
       </p:sp>
@@ -8466,8 +8466,8 @@
         </p:nvSpPr>
         <p:spPr>
           <a:xfrm>
-            <a:off x="640080" y="3465576"/>
-            <a:ext cx="3566160" cy="201168"/>
+            <a:off x="640080" y="3429000"/>
+            <a:ext cx="3566160" cy="237744"/>
           </a:xfrm>
           <a:prstGeom prst="rect">
             <a:avLst/>
@@ -8483,7 +8483,7 @@
               <a:buNone/>
             </a:pPr>
             <a:r>
-              <a:rPr lang="en-US" sz="800" i="1" dirty="0">
+              <a:rPr lang="en-US" sz="750" i="1" dirty="0">
                 <a:solidFill>
                   <a:srgbClr val="8B949E"/>
                 </a:solidFill>
@@ -8493,7 +8493,7 @@
               </a:rPr>
               <a:t>program littlekid_v1_0_0.py, lines 1 to 8 of 8, run under Python 3.13.16</a:t>
             </a:r>
-            <a:endParaRPr lang="en-US" sz="800" dirty="0"/>
+            <a:endParaRPr lang="en-US" sz="750" dirty="0"/>
           </a:p>
         </p:txBody>
       </p:sp>
@@ -9102,8 +9102,8 @@
         </p:nvSpPr>
         <p:spPr>
           <a:xfrm>
-            <a:off x="4846320" y="3831336"/>
-            <a:ext cx="3657600" cy="201168"/>
+            <a:off x="4846320" y="3794760"/>
+            <a:ext cx="3657600" cy="237744"/>
           </a:xfrm>
           <a:prstGeom prst="rect">
             <a:avLst/>
@@ -9119,7 +9119,7 @@
               <a:buNone/>
             </a:pPr>
             <a:r>
-              <a:rPr lang="en-US" sz="800" i="1" dirty="0">
+              <a:rPr lang="en-US" sz="750" i="1" dirty="0">
                 <a:solidFill>
                   <a:srgbClr val="8B949E"/>
                 </a:solidFill>
@@ -9129,7 +9129,7 @@
               </a:rPr>
               <a:t>program vampire_v1_0_0.py, lines 1 to 10 of 10, run under Python 3.13.16</a:t>
             </a:r>
-            <a:endParaRPr lang="en-US" sz="800" dirty="0"/>
+            <a:endParaRPr lang="en-US" sz="750" dirty="0"/>
           </a:p>
         </p:txBody>
       </p:sp>
@@ -10628,8 +10628,8 @@
         </p:nvSpPr>
         <p:spPr>
           <a:xfrm>
-            <a:off x="640080" y="3858768"/>
-            <a:ext cx="7863840" cy="201168"/>
+            <a:off x="640080" y="3822192"/>
+            <a:ext cx="7863840" cy="237744"/>
           </a:xfrm>
           <a:prstGeom prst="rect">
             <a:avLst/>
@@ -10645,7 +10645,7 @@
               <a:buNone/>
             </a:pPr>
             <a:r>
-              <a:rPr lang="en-US" sz="800" i="1" dirty="0">
+              <a:rPr lang="en-US" sz="750" i="1" dirty="0">
                 <a:solidFill>
                   <a:srgbClr val="8B949E"/>
                 </a:solidFill>
@@ -10655,7 +10655,7 @@
               </a:rPr>
               <a:t>program match_command_v1_0_0.py, lines 1 to 8 of 8, run under Python 3.13.16</a:t>
             </a:r>
-            <a:endParaRPr lang="en-US" sz="800" dirty="0"/>
+            <a:endParaRPr lang="en-US" sz="750" dirty="0"/>
           </a:p>
         </p:txBody>
       </p:sp>
@@ -11749,8 +11749,8 @@
         </p:nvSpPr>
         <p:spPr>
           <a:xfrm>
-            <a:off x="640080" y="3282696"/>
-            <a:ext cx="4754880" cy="201168"/>
+            <a:off x="640080" y="3246120"/>
+            <a:ext cx="4754880" cy="237744"/>
           </a:xfrm>
           <a:prstGeom prst="rect">
             <a:avLst/>
@@ -11766,7 +11766,7 @@
               <a:buNone/>
             </a:pPr>
             <a:r>
-              <a:rPr lang="en-US" sz="800" i="1" dirty="0">
+              <a:rPr lang="en-US" sz="750" i="1" dirty="0">
                 <a:solidFill>
                   <a:srgbClr val="8B949E"/>
                 </a:solidFill>
@@ -11776,7 +11776,7 @@
               </a:rPr>
               <a:t>program match_guard_v1_0_0.py, lines 1 to 6 of 6, run under Python 3.13.16</a:t>
             </a:r>
-            <a:endParaRPr lang="en-US" sz="800" dirty="0"/>
+            <a:endParaRPr lang="en-US" sz="750" dirty="0"/>
           </a:p>
         </p:txBody>
       </p:sp>
@@ -13446,8 +13446,8 @@
         </p:nvSpPr>
         <p:spPr>
           <a:xfrm>
-            <a:off x="640080" y="4197096"/>
-            <a:ext cx="7863840" cy="201168"/>
+            <a:off x="640080" y="4160520"/>
+            <a:ext cx="7863840" cy="237744"/>
           </a:xfrm>
           <a:prstGeom prst="rect">
             <a:avLst/>
@@ -13463,7 +13463,7 @@
               <a:buNone/>
             </a:pPr>
             <a:r>
-              <a:rPr lang="en-US" sz="800" i="1" dirty="0">
+              <a:rPr lang="en-US" sz="750" i="1" dirty="0">
                 <a:solidFill>
                   <a:srgbClr val="8B949E"/>
                 </a:solidFill>
@@ -13473,7 +13473,7 @@
               </a:rPr>
               <a:t>program walrus_size_v1_0_0.py, lines 1 to 3 of 3, run under Python 3.13.16</a:t>
             </a:r>
-            <a:endParaRPr lang="en-US" sz="800" dirty="0"/>
+            <a:endParaRPr lang="en-US" sz="750" dirty="0"/>
           </a:p>
         </p:txBody>
       </p:sp>
